--- a/ゲーム科3年/00_前期/ゲームエンジンⅤ/08_弾丸の発射.pptx
+++ b/ゲーム科3年/00_前期/ゲームエンジンⅤ/08_弾丸の発射.pptx
@@ -271,7 +271,7 @@
           <a:p>
             <a:fld id="{E9CC885B-4903-4D54-9A93-00025F12DED9}" type="datetimeFigureOut">
               <a:rPr kumimoji="1" lang="ja-JP" altLang="en-US" smtClean="0"/>
-              <a:t>2025/2/5</a:t>
+              <a:t>2026/3/26</a:t>
             </a:fld>
             <a:endParaRPr kumimoji="1" lang="ja-JP" altLang="en-US"/>
           </a:p>
@@ -501,7 +501,7 @@
           <a:p>
             <a:fld id="{E9CC885B-4903-4D54-9A93-00025F12DED9}" type="datetimeFigureOut">
               <a:rPr kumimoji="1" lang="ja-JP" altLang="en-US" smtClean="0"/>
-              <a:t>2025/2/5</a:t>
+              <a:t>2026/3/26</a:t>
             </a:fld>
             <a:endParaRPr kumimoji="1" lang="ja-JP" altLang="en-US"/>
           </a:p>
@@ -741,7 +741,7 @@
           <a:p>
             <a:fld id="{E9CC885B-4903-4D54-9A93-00025F12DED9}" type="datetimeFigureOut">
               <a:rPr kumimoji="1" lang="ja-JP" altLang="en-US" smtClean="0"/>
-              <a:t>2025/2/5</a:t>
+              <a:t>2026/3/26</a:t>
             </a:fld>
             <a:endParaRPr kumimoji="1" lang="ja-JP" altLang="en-US"/>
           </a:p>
@@ -971,7 +971,7 @@
           <a:p>
             <a:fld id="{E9CC885B-4903-4D54-9A93-00025F12DED9}" type="datetimeFigureOut">
               <a:rPr kumimoji="1" lang="ja-JP" altLang="en-US" smtClean="0"/>
-              <a:t>2025/2/5</a:t>
+              <a:t>2026/3/26</a:t>
             </a:fld>
             <a:endParaRPr kumimoji="1" lang="ja-JP" altLang="en-US"/>
           </a:p>
@@ -1246,7 +1246,7 @@
           <a:p>
             <a:fld id="{E9CC885B-4903-4D54-9A93-00025F12DED9}" type="datetimeFigureOut">
               <a:rPr kumimoji="1" lang="ja-JP" altLang="en-US" smtClean="0"/>
-              <a:t>2025/2/5</a:t>
+              <a:t>2026/3/26</a:t>
             </a:fld>
             <a:endParaRPr kumimoji="1" lang="ja-JP" altLang="en-US"/>
           </a:p>
@@ -1575,7 +1575,7 @@
           <a:p>
             <a:fld id="{E9CC885B-4903-4D54-9A93-00025F12DED9}" type="datetimeFigureOut">
               <a:rPr kumimoji="1" lang="ja-JP" altLang="en-US" smtClean="0"/>
-              <a:t>2025/2/5</a:t>
+              <a:t>2026/3/26</a:t>
             </a:fld>
             <a:endParaRPr kumimoji="1" lang="ja-JP" altLang="en-US"/>
           </a:p>
@@ -2051,7 +2051,7 @@
           <a:p>
             <a:fld id="{E9CC885B-4903-4D54-9A93-00025F12DED9}" type="datetimeFigureOut">
               <a:rPr kumimoji="1" lang="ja-JP" altLang="en-US" smtClean="0"/>
-              <a:t>2025/2/5</a:t>
+              <a:t>2026/3/26</a:t>
             </a:fld>
             <a:endParaRPr kumimoji="1" lang="ja-JP" altLang="en-US"/>
           </a:p>
@@ -2192,7 +2192,7 @@
           <a:p>
             <a:fld id="{E9CC885B-4903-4D54-9A93-00025F12DED9}" type="datetimeFigureOut">
               <a:rPr kumimoji="1" lang="ja-JP" altLang="en-US" smtClean="0"/>
-              <a:t>2025/2/5</a:t>
+              <a:t>2026/3/26</a:t>
             </a:fld>
             <a:endParaRPr kumimoji="1" lang="ja-JP" altLang="en-US"/>
           </a:p>
@@ -2305,7 +2305,7 @@
           <a:p>
             <a:fld id="{E9CC885B-4903-4D54-9A93-00025F12DED9}" type="datetimeFigureOut">
               <a:rPr kumimoji="1" lang="ja-JP" altLang="en-US" smtClean="0"/>
-              <a:t>2025/2/5</a:t>
+              <a:t>2026/3/26</a:t>
             </a:fld>
             <a:endParaRPr kumimoji="1" lang="ja-JP" altLang="en-US"/>
           </a:p>
@@ -2648,7 +2648,7 @@
           <a:p>
             <a:fld id="{E9CC885B-4903-4D54-9A93-00025F12DED9}" type="datetimeFigureOut">
               <a:rPr kumimoji="1" lang="ja-JP" altLang="en-US" smtClean="0"/>
-              <a:t>2025/2/5</a:t>
+              <a:t>2026/3/26</a:t>
             </a:fld>
             <a:endParaRPr kumimoji="1" lang="ja-JP" altLang="en-US"/>
           </a:p>
@@ -2936,7 +2936,7 @@
           <a:p>
             <a:fld id="{E9CC885B-4903-4D54-9A93-00025F12DED9}" type="datetimeFigureOut">
               <a:rPr kumimoji="1" lang="ja-JP" altLang="en-US" smtClean="0"/>
-              <a:t>2025/2/5</a:t>
+              <a:t>2026/3/26</a:t>
             </a:fld>
             <a:endParaRPr kumimoji="1" lang="ja-JP" altLang="en-US"/>
           </a:p>
@@ -3209,7 +3209,7 @@
           <a:p>
             <a:fld id="{E9CC885B-4903-4D54-9A93-00025F12DED9}" type="datetimeFigureOut">
               <a:rPr kumimoji="1" lang="ja-JP" altLang="en-US" smtClean="0"/>
-              <a:t>2025/2/5</a:t>
+              <a:t>2026/3/26</a:t>
             </a:fld>
             <a:endParaRPr kumimoji="1" lang="ja-JP" altLang="en-US"/>
           </a:p>
@@ -4905,7 +4905,7 @@
         <p:spPr>
           <a:xfrm>
             <a:off x="567542" y="1216429"/>
-            <a:ext cx="4150495" cy="461665"/>
+            <a:ext cx="4283545" cy="461665"/>
           </a:xfrm>
           <a:prstGeom prst="rect">
             <a:avLst/>
@@ -4919,7 +4919,11 @@
           <a:lstStyle/>
           <a:p>
             <a:r>
-              <a:rPr lang="en-US" altLang="ja-JP" sz="2400" dirty="0" err="1"/>
+              <a:rPr lang="en-US" altLang="ja-JP" sz="2400" b="1" dirty="0" err="1">
+                <a:solidFill>
+                  <a:srgbClr val="FF0000"/>
+                </a:solidFill>
+              </a:rPr>
               <a:t>NormalBullet.h</a:t>
             </a:r>
             <a:r>
@@ -5092,7 +5096,7 @@
         <p:spPr>
           <a:xfrm>
             <a:off x="567542" y="1216429"/>
-            <a:ext cx="4487126" cy="461665"/>
+            <a:ext cx="4641014" cy="461665"/>
           </a:xfrm>
           <a:prstGeom prst="rect">
             <a:avLst/>
@@ -5106,7 +5110,11 @@
           <a:lstStyle/>
           <a:p>
             <a:r>
-              <a:rPr lang="en-US" altLang="ja-JP" sz="2400" dirty="0"/>
+              <a:rPr lang="en-US" altLang="ja-JP" sz="2400" b="1" dirty="0">
+                <a:solidFill>
+                  <a:srgbClr val="FF0000"/>
+                </a:solidFill>
+              </a:rPr>
               <a:t>NormalBullet.cpp</a:t>
             </a:r>
             <a:r>
